--- a/example6-rppa/results/report.pptx
+++ b/example6-rppa/results/report.pptx
@@ -10,7 +10,7 @@
   <p:handoutMasterIdLst>
     <p:handoutMasterId r:id="rId3"/>
   </p:handoutMasterIdLst>
-  <p:sldIdLst xmlns:a="http://schemas.openxmlformats.org/drawingml/2006/main" xmlns:r="http://schemas.openxmlformats.org/officeDocument/2006/relationships" xmlns:p="http://schemas.openxmlformats.org/presentationml/2006/main">
+  <p:sldIdLst>
     <p:sldId id="256" r:id="rId8"/>
     <p:sldId id="257" r:id="rId9"/>
     <p:sldId id="258" r:id="rId10"/>
@@ -1787,7 +1787,7 @@
           <a:chExt cx="0" cy="0"/>
         </a:xfrm>
       </p:grpSpPr>
-      <p:sp xmlns:a="http://schemas.openxmlformats.org/drawingml/2006/main" xmlns:r="http://schemas.openxmlformats.org/officeDocument/2006/relationships" xmlns:p="http://schemas.openxmlformats.org/presentationml/2006/main">
+      <p:sp>
         <p:nvSpPr>
           <p:cNvPr id="2" name="Title 1"/>
           <p:cNvSpPr>
@@ -1814,7 +1814,7 @@
           </a:p>
         </p:txBody>
       </p:sp>
-      <p:sp xmlns:a="http://schemas.openxmlformats.org/drawingml/2006/main" xmlns:r="http://schemas.openxmlformats.org/officeDocument/2006/relationships" xmlns:p="http://schemas.openxmlformats.org/presentationml/2006/main">
+      <p:sp>
         <p:nvSpPr>
           <p:cNvPr id="3" name="Subtitle 2"/>
           <p:cNvSpPr>
@@ -1866,7 +1866,7 @@
           <a:chExt cx="0" cy="0"/>
         </a:xfrm>
       </p:grpSpPr>
-      <p:sp xmlns:a="http://schemas.openxmlformats.org/drawingml/2006/main" xmlns:r="http://schemas.openxmlformats.org/officeDocument/2006/relationships" xmlns:p="http://schemas.openxmlformats.org/presentationml/2006/main">
+      <p:sp>
         <p:nvSpPr>
           <p:cNvPr id="2" name="Title 1"/>
           <p:cNvSpPr>
@@ -1893,7 +1893,7 @@
           </a:p>
         </p:txBody>
       </p:sp>
-      <p:sp xmlns:a="http://schemas.openxmlformats.org/drawingml/2006/main" xmlns:r="http://schemas.openxmlformats.org/officeDocument/2006/relationships" xmlns:p="http://schemas.openxmlformats.org/presentationml/2006/main">
+      <p:sp>
         <p:nvSpPr>
           <p:cNvPr id="3" name="Content Placeholder 2"/>
           <p:cNvSpPr>
@@ -1988,7 +1988,7 @@
           <a:chExt cx="0" cy="0"/>
         </a:xfrm>
       </p:grpSpPr>
-      <p:sp xmlns:a="http://schemas.openxmlformats.org/drawingml/2006/main" xmlns:r="http://schemas.openxmlformats.org/officeDocument/2006/relationships" xmlns:p="http://schemas.openxmlformats.org/presentationml/2006/main">
+      <p:sp>
         <p:nvSpPr>
           <p:cNvPr id="2" name="Title 1"/>
           <p:cNvSpPr>
@@ -2015,7 +2015,7 @@
           </a:p>
         </p:txBody>
       </p:sp>
-      <p:pic xmlns:a="http://schemas.openxmlformats.org/drawingml/2006/main" xmlns:r="http://schemas.openxmlformats.org/officeDocument/2006/relationships" xmlns:p="http://schemas.openxmlformats.org/presentationml/2006/main">
+      <p:pic>
         <p:nvPicPr>
           <p:cNvPr id="3" name="" descr=""/>
           <p:cNvPicPr>
@@ -2066,7 +2066,7 @@
           <a:chExt cx="0" cy="0"/>
         </a:xfrm>
       </p:grpSpPr>
-      <p:sp xmlns:a="http://schemas.openxmlformats.org/drawingml/2006/main" xmlns:r="http://schemas.openxmlformats.org/officeDocument/2006/relationships" xmlns:p="http://schemas.openxmlformats.org/presentationml/2006/main">
+      <p:sp>
         <p:nvSpPr>
           <p:cNvPr id="2" name="Title 1"/>
           <p:cNvSpPr>
@@ -2093,7 +2093,7 @@
           </a:p>
         </p:txBody>
       </p:sp>
-      <p:pic xmlns:a="http://schemas.openxmlformats.org/drawingml/2006/main" xmlns:r="http://schemas.openxmlformats.org/officeDocument/2006/relationships" xmlns:p="http://schemas.openxmlformats.org/presentationml/2006/main">
+      <p:pic>
         <p:nvPicPr>
           <p:cNvPr id="3" name="" descr=""/>
           <p:cNvPicPr>
@@ -2144,7 +2144,7 @@
           <a:chExt cx="0" cy="0"/>
         </a:xfrm>
       </p:grpSpPr>
-      <p:sp xmlns:a="http://schemas.openxmlformats.org/drawingml/2006/main" xmlns:r="http://schemas.openxmlformats.org/officeDocument/2006/relationships" xmlns:p="http://schemas.openxmlformats.org/presentationml/2006/main">
+      <p:sp>
         <p:nvSpPr>
           <p:cNvPr id="2" name="Title 1"/>
           <p:cNvSpPr>
@@ -2171,7 +2171,7 @@
           </a:p>
         </p:txBody>
       </p:sp>
-      <p:sp xmlns:a="http://schemas.openxmlformats.org/drawingml/2006/main" xmlns:r="http://schemas.openxmlformats.org/officeDocument/2006/relationships" xmlns:p="http://schemas.openxmlformats.org/presentationml/2006/main">
+      <p:sp>
         <p:nvSpPr>
           <p:cNvPr id="3" name="Text Placeholder 4"/>
           <p:cNvSpPr>
@@ -2198,7 +2198,7 @@
           </a:p>
         </p:txBody>
       </p:sp>
-      <p:sp xmlns:a="http://schemas.openxmlformats.org/drawingml/2006/main" xmlns:r="http://schemas.openxmlformats.org/officeDocument/2006/relationships" xmlns:p="http://schemas.openxmlformats.org/presentationml/2006/main">
+      <p:sp>
         <p:nvSpPr>
           <p:cNvPr id="4" name="Text Placeholder 2"/>
           <p:cNvSpPr>
@@ -2225,7 +2225,7 @@
           </a:p>
         </p:txBody>
       </p:sp>
-      <p:pic xmlns:a="http://schemas.openxmlformats.org/drawingml/2006/main" xmlns:r="http://schemas.openxmlformats.org/officeDocument/2006/relationships" xmlns:p="http://schemas.openxmlformats.org/presentationml/2006/main">
+      <p:pic>
         <p:nvPicPr>
           <p:cNvPr id="5" name="" descr=""/>
           <p:cNvPicPr>
@@ -2251,7 +2251,7 @@
           </a:prstGeom>
         </p:spPr>
       </p:pic>
-      <p:pic xmlns:a="http://schemas.openxmlformats.org/drawingml/2006/main" xmlns:r="http://schemas.openxmlformats.org/officeDocument/2006/relationships" xmlns:p="http://schemas.openxmlformats.org/presentationml/2006/main">
+      <p:pic>
         <p:nvPicPr>
           <p:cNvPr id="6" name="" descr=""/>
           <p:cNvPicPr>
@@ -2302,7 +2302,7 @@
           <a:chExt cx="0" cy="0"/>
         </a:xfrm>
       </p:grpSpPr>
-      <p:sp xmlns:a="http://schemas.openxmlformats.org/drawingml/2006/main" xmlns:r="http://schemas.openxmlformats.org/officeDocument/2006/relationships" xmlns:p="http://schemas.openxmlformats.org/presentationml/2006/main">
+      <p:sp>
         <p:nvSpPr>
           <p:cNvPr id="2" name="Title 1"/>
           <p:cNvSpPr>
@@ -2329,7 +2329,7 @@
           </a:p>
         </p:txBody>
       </p:sp>
-      <p:sp xmlns:a="http://schemas.openxmlformats.org/drawingml/2006/main" xmlns:r="http://schemas.openxmlformats.org/officeDocument/2006/relationships" xmlns:p="http://schemas.openxmlformats.org/presentationml/2006/main">
+      <p:sp>
         <p:nvSpPr>
           <p:cNvPr id="3" name="Text Placeholder 4"/>
           <p:cNvSpPr>
@@ -2351,12 +2351,12 @@
           <a:p>
             <a:r>
               <a:rPr/>
-              <a:t>Differential FDR&lt;0.25</a:t>
+              <a:t>Differential pval&lt;0.05</a:t>
             </a:r>
           </a:p>
         </p:txBody>
       </p:sp>
-      <p:sp xmlns:a="http://schemas.openxmlformats.org/drawingml/2006/main" xmlns:r="http://schemas.openxmlformats.org/officeDocument/2006/relationships" xmlns:p="http://schemas.openxmlformats.org/presentationml/2006/main">
+      <p:sp>
         <p:nvSpPr>
           <p:cNvPr id="4" name="Text Placeholder 2"/>
           <p:cNvSpPr>
@@ -2378,12 +2378,12 @@
           <a:p>
             <a:r>
               <a:rPr/>
-              <a:t>Complete Set FDR=1</a:t>
+              <a:t>Complete Set pval=1</a:t>
             </a:r>
           </a:p>
         </p:txBody>
       </p:sp>
-      <p:pic xmlns:a="http://schemas.openxmlformats.org/drawingml/2006/main" xmlns:r="http://schemas.openxmlformats.org/officeDocument/2006/relationships" xmlns:p="http://schemas.openxmlformats.org/presentationml/2006/main">
+      <p:pic>
         <p:nvPicPr>
           <p:cNvPr id="5" name="" descr=""/>
           <p:cNvPicPr>
@@ -2409,7 +2409,7 @@
           </a:prstGeom>
         </p:spPr>
       </p:pic>
-      <p:pic xmlns:a="http://schemas.openxmlformats.org/drawingml/2006/main" xmlns:r="http://schemas.openxmlformats.org/officeDocument/2006/relationships" xmlns:p="http://schemas.openxmlformats.org/presentationml/2006/main">
+      <p:pic>
         <p:nvPicPr>
           <p:cNvPr id="6" name="" descr=""/>
           <p:cNvPicPr>
